--- a/제안서/변동성하베스트펀드_AITop2_초안.pptx
+++ b/제안서/변동성하베스트펀드_AITop2_초안.pptx
@@ -12891,7 +12891,7 @@
                 </a:solidFill>
                 <a:latin typeface="맑은 고딕"/>
               </a:rPr>
-              <a:t>최근 한국시장 변동성이 5년 내 최고 수준(99.7%ile). 변동성이 클수록 변동성 매매의 수익 기회가 커집니다.</a:t>
+              <a:t>한국시장 변동성이 최근 5년 중 최고 수준입니다(2026-07-10 기준, 60영업일 연율화). 변동성이 클수록 변동성 매매의 수익 기회가 커집니다.</a:t>
             </a:r>
           </a:p>
         </p:txBody>
